--- a/ADS/PPTs/Tree BST Graph.pptx
+++ b/ADS/PPTs/Tree BST Graph.pptx
@@ -1,25 +1,25 @@
 
 <file path=ppt/presentation.xml><?xml version="1.0" encoding="utf-8"?>
-<p:presentation xmlns:a="http://schemas.openxmlformats.org/drawingml/2006/main" xmlns:r="http://schemas.openxmlformats.org/officeDocument/2006/relationships" xmlns:p="http://schemas.openxmlformats.org/presentationml/2006/main" saveSubsetFonts="1">
+<p:presentation xmlns:a="http://schemas.openxmlformats.org/drawingml/2006/main" xmlns:r="http://schemas.openxmlformats.org/officeDocument/2006/relationships" xmlns:p="http://schemas.openxmlformats.org/presentationml/2006/main">
   <p:sldMasterIdLst>
     <p:sldMasterId id="2147483648" r:id="rId1"/>
   </p:sldMasterIdLst>
   <p:sldIdLst>
-    <p:sldId id="256" r:id="rId2"/>
-    <p:sldId id="257" r:id="rId3"/>
-    <p:sldId id="258" r:id="rId4"/>
-    <p:sldId id="259" r:id="rId5"/>
-    <p:sldId id="260" r:id="rId6"/>
-    <p:sldId id="261" r:id="rId7"/>
-    <p:sldId id="262" r:id="rId8"/>
-    <p:sldId id="263" r:id="rId9"/>
-    <p:sldId id="264" r:id="rId10"/>
-    <p:sldId id="265" r:id="rId11"/>
-    <p:sldId id="266" r:id="rId12"/>
-    <p:sldId id="267" r:id="rId13"/>
-    <p:sldId id="268" r:id="rId14"/>
-    <p:sldId id="269" r:id="rId15"/>
-    <p:sldId id="270" r:id="rId16"/>
+    <p:sldId id="256" r:id="rId3"/>
+    <p:sldId id="257" r:id="rId4"/>
+    <p:sldId id="258" r:id="rId5"/>
+    <p:sldId id="259" r:id="rId6"/>
+    <p:sldId id="260" r:id="rId7"/>
+    <p:sldId id="261" r:id="rId8"/>
+    <p:sldId id="262" r:id="rId9"/>
+    <p:sldId id="263" r:id="rId10"/>
+    <p:sldId id="264" r:id="rId11"/>
+    <p:sldId id="265" r:id="rId12"/>
+    <p:sldId id="266" r:id="rId13"/>
+    <p:sldId id="267" r:id="rId14"/>
+    <p:sldId id="268" r:id="rId15"/>
+    <p:sldId id="269" r:id="rId16"/>
+    <p:sldId id="270" r:id="rId17"/>
   </p:sldIdLst>
   <p:sldSz cx="9144000" cy="6858000" type="screen4x3"/>
   <p:notesSz cx="6858000" cy="9144000"/>
@@ -302,8 +302,6 @@
           <a:p>
             <a:fld id="{1D8BD707-D9CF-40AE-B4C6-C98DA3205C09}" type="datetimeFigureOut">
               <a:rPr lang="en-US" smtClean="0"/>
-              <a:pPr/>
-              <a:t>7/29/2026</a:t>
             </a:fld>
             <a:endParaRPr lang="en-US"/>
           </a:p>
@@ -345,8 +343,6 @@
           <a:p>
             <a:fld id="{B6F15528-21DE-4FAA-801E-634DDDAF4B2B}" type="slidenum">
               <a:rPr lang="en-US" smtClean="0"/>
-              <a:pPr/>
-              <a:t>‹#›</a:t>
             </a:fld>
             <a:endParaRPr lang="en-US"/>
           </a:p>
@@ -420,6 +416,7 @@
               <a:rPr lang="en-US" smtClean="0"/>
               <a:t>Click to edit Master text styles</a:t>
             </a:r>
+            <a:endParaRPr lang="en-US" smtClean="0"/>
           </a:p>
           <a:p>
             <a:pPr lvl="1"/>
@@ -427,6 +424,7 @@
               <a:rPr lang="en-US" smtClean="0"/>
               <a:t>Second level</a:t>
             </a:r>
+            <a:endParaRPr lang="en-US" smtClean="0"/>
           </a:p>
           <a:p>
             <a:pPr lvl="2"/>
@@ -434,6 +432,7 @@
               <a:rPr lang="en-US" smtClean="0"/>
               <a:t>Third level</a:t>
             </a:r>
+            <a:endParaRPr lang="en-US" smtClean="0"/>
           </a:p>
           <a:p>
             <a:pPr lvl="3"/>
@@ -441,6 +440,7 @@
               <a:rPr lang="en-US" smtClean="0"/>
               <a:t>Fourth level</a:t>
             </a:r>
+            <a:endParaRPr lang="en-US" smtClean="0"/>
           </a:p>
           <a:p>
             <a:pPr lvl="4"/>
@@ -469,8 +469,6 @@
           <a:p>
             <a:fld id="{1D8BD707-D9CF-40AE-B4C6-C98DA3205C09}" type="datetimeFigureOut">
               <a:rPr lang="en-US" smtClean="0"/>
-              <a:pPr/>
-              <a:t>7/29/2026</a:t>
             </a:fld>
             <a:endParaRPr lang="en-US"/>
           </a:p>
@@ -512,8 +510,6 @@
           <a:p>
             <a:fld id="{B6F15528-21DE-4FAA-801E-634DDDAF4B2B}" type="slidenum">
               <a:rPr lang="en-US" smtClean="0"/>
-              <a:pPr/>
-              <a:t>‹#›</a:t>
             </a:fld>
             <a:endParaRPr lang="en-US"/>
           </a:p>
@@ -597,6 +593,7 @@
               <a:rPr lang="en-US" smtClean="0"/>
               <a:t>Click to edit Master text styles</a:t>
             </a:r>
+            <a:endParaRPr lang="en-US" smtClean="0"/>
           </a:p>
           <a:p>
             <a:pPr lvl="1"/>
@@ -604,6 +601,7 @@
               <a:rPr lang="en-US" smtClean="0"/>
               <a:t>Second level</a:t>
             </a:r>
+            <a:endParaRPr lang="en-US" smtClean="0"/>
           </a:p>
           <a:p>
             <a:pPr lvl="2"/>
@@ -611,6 +609,7 @@
               <a:rPr lang="en-US" smtClean="0"/>
               <a:t>Third level</a:t>
             </a:r>
+            <a:endParaRPr lang="en-US" smtClean="0"/>
           </a:p>
           <a:p>
             <a:pPr lvl="3"/>
@@ -618,6 +617,7 @@
               <a:rPr lang="en-US" smtClean="0"/>
               <a:t>Fourth level</a:t>
             </a:r>
+            <a:endParaRPr lang="en-US" smtClean="0"/>
           </a:p>
           <a:p>
             <a:pPr lvl="4"/>
@@ -646,8 +646,6 @@
           <a:p>
             <a:fld id="{1D8BD707-D9CF-40AE-B4C6-C98DA3205C09}" type="datetimeFigureOut">
               <a:rPr lang="en-US" smtClean="0"/>
-              <a:pPr/>
-              <a:t>7/29/2026</a:t>
             </a:fld>
             <a:endParaRPr lang="en-US"/>
           </a:p>
@@ -689,8 +687,6 @@
           <a:p>
             <a:fld id="{B6F15528-21DE-4FAA-801E-634DDDAF4B2B}" type="slidenum">
               <a:rPr lang="en-US" smtClean="0"/>
-              <a:pPr/>
-              <a:t>‹#›</a:t>
             </a:fld>
             <a:endParaRPr lang="en-US"/>
           </a:p>
@@ -764,6 +760,7 @@
               <a:rPr lang="en-US" smtClean="0"/>
               <a:t>Click to edit Master text styles</a:t>
             </a:r>
+            <a:endParaRPr lang="en-US" smtClean="0"/>
           </a:p>
           <a:p>
             <a:pPr lvl="1"/>
@@ -771,6 +768,7 @@
               <a:rPr lang="en-US" smtClean="0"/>
               <a:t>Second level</a:t>
             </a:r>
+            <a:endParaRPr lang="en-US" smtClean="0"/>
           </a:p>
           <a:p>
             <a:pPr lvl="2"/>
@@ -778,6 +776,7 @@
               <a:rPr lang="en-US" smtClean="0"/>
               <a:t>Third level</a:t>
             </a:r>
+            <a:endParaRPr lang="en-US" smtClean="0"/>
           </a:p>
           <a:p>
             <a:pPr lvl="3"/>
@@ -785,6 +784,7 @@
               <a:rPr lang="en-US" smtClean="0"/>
               <a:t>Fourth level</a:t>
             </a:r>
+            <a:endParaRPr lang="en-US" smtClean="0"/>
           </a:p>
           <a:p>
             <a:pPr lvl="4"/>
@@ -813,8 +813,6 @@
           <a:p>
             <a:fld id="{1D8BD707-D9CF-40AE-B4C6-C98DA3205C09}" type="datetimeFigureOut">
               <a:rPr lang="en-US" smtClean="0"/>
-              <a:pPr/>
-              <a:t>7/29/2026</a:t>
             </a:fld>
             <a:endParaRPr lang="en-US"/>
           </a:p>
@@ -856,8 +854,6 @@
           <a:p>
             <a:fld id="{B6F15528-21DE-4FAA-801E-634DDDAF4B2B}" type="slidenum">
               <a:rPr lang="en-US" smtClean="0"/>
-              <a:pPr/>
-              <a:t>‹#›</a:t>
             </a:fld>
             <a:endParaRPr lang="en-US"/>
           </a:p>
@@ -1036,6 +1032,7 @@
               <a:rPr lang="en-US" smtClean="0"/>
               <a:t>Click to edit Master text styles</a:t>
             </a:r>
+            <a:endParaRPr lang="en-US" smtClean="0"/>
           </a:p>
         </p:txBody>
       </p:sp>
@@ -1056,8 +1053,6 @@
           <a:p>
             <a:fld id="{1D8BD707-D9CF-40AE-B4C6-C98DA3205C09}" type="datetimeFigureOut">
               <a:rPr lang="en-US" smtClean="0"/>
-              <a:pPr/>
-              <a:t>7/29/2026</a:t>
             </a:fld>
             <a:endParaRPr lang="en-US"/>
           </a:p>
@@ -1099,8 +1094,6 @@
           <a:p>
             <a:fld id="{B6F15528-21DE-4FAA-801E-634DDDAF4B2B}" type="slidenum">
               <a:rPr lang="en-US" smtClean="0"/>
-              <a:pPr/>
-              <a:t>‹#›</a:t>
             </a:fld>
             <a:endParaRPr lang="en-US"/>
           </a:p>
@@ -1207,6 +1200,7 @@
               <a:rPr lang="en-US" smtClean="0"/>
               <a:t>Click to edit Master text styles</a:t>
             </a:r>
+            <a:endParaRPr lang="en-US" smtClean="0"/>
           </a:p>
           <a:p>
             <a:pPr lvl="1"/>
@@ -1214,6 +1208,7 @@
               <a:rPr lang="en-US" smtClean="0"/>
               <a:t>Second level</a:t>
             </a:r>
+            <a:endParaRPr lang="en-US" smtClean="0"/>
           </a:p>
           <a:p>
             <a:pPr lvl="2"/>
@@ -1221,6 +1216,7 @@
               <a:rPr lang="en-US" smtClean="0"/>
               <a:t>Third level</a:t>
             </a:r>
+            <a:endParaRPr lang="en-US" smtClean="0"/>
           </a:p>
           <a:p>
             <a:pPr lvl="3"/>
@@ -1228,6 +1224,7 @@
               <a:rPr lang="en-US" smtClean="0"/>
               <a:t>Fourth level</a:t>
             </a:r>
+            <a:endParaRPr lang="en-US" smtClean="0"/>
           </a:p>
           <a:p>
             <a:pPr lvl="4"/>
@@ -1292,6 +1289,7 @@
               <a:rPr lang="en-US" smtClean="0"/>
               <a:t>Click to edit Master text styles</a:t>
             </a:r>
+            <a:endParaRPr lang="en-US" smtClean="0"/>
           </a:p>
           <a:p>
             <a:pPr lvl="1"/>
@@ -1299,6 +1297,7 @@
               <a:rPr lang="en-US" smtClean="0"/>
               <a:t>Second level</a:t>
             </a:r>
+            <a:endParaRPr lang="en-US" smtClean="0"/>
           </a:p>
           <a:p>
             <a:pPr lvl="2"/>
@@ -1306,6 +1305,7 @@
               <a:rPr lang="en-US" smtClean="0"/>
               <a:t>Third level</a:t>
             </a:r>
+            <a:endParaRPr lang="en-US" smtClean="0"/>
           </a:p>
           <a:p>
             <a:pPr lvl="3"/>
@@ -1313,6 +1313,7 @@
               <a:rPr lang="en-US" smtClean="0"/>
               <a:t>Fourth level</a:t>
             </a:r>
+            <a:endParaRPr lang="en-US" smtClean="0"/>
           </a:p>
           <a:p>
             <a:pPr lvl="4"/>
@@ -1341,8 +1342,6 @@
           <a:p>
             <a:fld id="{1D8BD707-D9CF-40AE-B4C6-C98DA3205C09}" type="datetimeFigureOut">
               <a:rPr lang="en-US" smtClean="0"/>
-              <a:pPr/>
-              <a:t>7/29/2026</a:t>
             </a:fld>
             <a:endParaRPr lang="en-US"/>
           </a:p>
@@ -1384,8 +1383,6 @@
           <a:p>
             <a:fld id="{B6F15528-21DE-4FAA-801E-634DDDAF4B2B}" type="slidenum">
               <a:rPr lang="en-US" smtClean="0"/>
-              <a:pPr/>
-              <a:t>‹#›</a:t>
             </a:fld>
             <a:endParaRPr lang="en-US"/>
           </a:p>
@@ -1505,6 +1502,7 @@
               <a:rPr lang="en-US" smtClean="0"/>
               <a:t>Click to edit Master text styles</a:t>
             </a:r>
+            <a:endParaRPr lang="en-US" smtClean="0"/>
           </a:p>
         </p:txBody>
       </p:sp>
@@ -1561,6 +1559,7 @@
               <a:rPr lang="en-US" smtClean="0"/>
               <a:t>Click to edit Master text styles</a:t>
             </a:r>
+            <a:endParaRPr lang="en-US" smtClean="0"/>
           </a:p>
           <a:p>
             <a:pPr lvl="1"/>
@@ -1568,6 +1567,7 @@
               <a:rPr lang="en-US" smtClean="0"/>
               <a:t>Second level</a:t>
             </a:r>
+            <a:endParaRPr lang="en-US" smtClean="0"/>
           </a:p>
           <a:p>
             <a:pPr lvl="2"/>
@@ -1575,6 +1575,7 @@
               <a:rPr lang="en-US" smtClean="0"/>
               <a:t>Third level</a:t>
             </a:r>
+            <a:endParaRPr lang="en-US" smtClean="0"/>
           </a:p>
           <a:p>
             <a:pPr lvl="3"/>
@@ -1582,6 +1583,7 @@
               <a:rPr lang="en-US" smtClean="0"/>
               <a:t>Fourth level</a:t>
             </a:r>
+            <a:endParaRPr lang="en-US" smtClean="0"/>
           </a:p>
           <a:p>
             <a:pPr lvl="4"/>
@@ -1655,6 +1657,7 @@
               <a:rPr lang="en-US" smtClean="0"/>
               <a:t>Click to edit Master text styles</a:t>
             </a:r>
+            <a:endParaRPr lang="en-US" smtClean="0"/>
           </a:p>
         </p:txBody>
       </p:sp>
@@ -1711,6 +1714,7 @@
               <a:rPr lang="en-US" smtClean="0"/>
               <a:t>Click to edit Master text styles</a:t>
             </a:r>
+            <a:endParaRPr lang="en-US" smtClean="0"/>
           </a:p>
           <a:p>
             <a:pPr lvl="1"/>
@@ -1718,6 +1722,7 @@
               <a:rPr lang="en-US" smtClean="0"/>
               <a:t>Second level</a:t>
             </a:r>
+            <a:endParaRPr lang="en-US" smtClean="0"/>
           </a:p>
           <a:p>
             <a:pPr lvl="2"/>
@@ -1725,6 +1730,7 @@
               <a:rPr lang="en-US" smtClean="0"/>
               <a:t>Third level</a:t>
             </a:r>
+            <a:endParaRPr lang="en-US" smtClean="0"/>
           </a:p>
           <a:p>
             <a:pPr lvl="3"/>
@@ -1732,6 +1738,7 @@
               <a:rPr lang="en-US" smtClean="0"/>
               <a:t>Fourth level</a:t>
             </a:r>
+            <a:endParaRPr lang="en-US" smtClean="0"/>
           </a:p>
           <a:p>
             <a:pPr lvl="4"/>
@@ -1760,8 +1767,6 @@
           <a:p>
             <a:fld id="{1D8BD707-D9CF-40AE-B4C6-C98DA3205C09}" type="datetimeFigureOut">
               <a:rPr lang="en-US" smtClean="0"/>
-              <a:pPr/>
-              <a:t>7/29/2026</a:t>
             </a:fld>
             <a:endParaRPr lang="en-US"/>
           </a:p>
@@ -1803,8 +1808,6 @@
           <a:p>
             <a:fld id="{B6F15528-21DE-4FAA-801E-634DDDAF4B2B}" type="slidenum">
               <a:rPr lang="en-US" smtClean="0"/>
-              <a:pPr/>
-              <a:t>‹#›</a:t>
             </a:fld>
             <a:endParaRPr lang="en-US"/>
           </a:p>
@@ -1875,8 +1878,6 @@
           <a:p>
             <a:fld id="{1D8BD707-D9CF-40AE-B4C6-C98DA3205C09}" type="datetimeFigureOut">
               <a:rPr lang="en-US" smtClean="0"/>
-              <a:pPr/>
-              <a:t>7/29/2026</a:t>
             </a:fld>
             <a:endParaRPr lang="en-US"/>
           </a:p>
@@ -1918,8 +1919,6 @@
           <a:p>
             <a:fld id="{B6F15528-21DE-4FAA-801E-634DDDAF4B2B}" type="slidenum">
               <a:rPr lang="en-US" smtClean="0"/>
-              <a:pPr/>
-              <a:t>‹#›</a:t>
             </a:fld>
             <a:endParaRPr lang="en-US"/>
           </a:p>
@@ -1967,8 +1966,6 @@
           <a:p>
             <a:fld id="{1D8BD707-D9CF-40AE-B4C6-C98DA3205C09}" type="datetimeFigureOut">
               <a:rPr lang="en-US" smtClean="0"/>
-              <a:pPr/>
-              <a:t>7/29/2026</a:t>
             </a:fld>
             <a:endParaRPr lang="en-US"/>
           </a:p>
@@ -2010,8 +2007,6 @@
           <a:p>
             <a:fld id="{B6F15528-21DE-4FAA-801E-634DDDAF4B2B}" type="slidenum">
               <a:rPr lang="en-US" smtClean="0"/>
-              <a:pPr/>
-              <a:t>‹#›</a:t>
             </a:fld>
             <a:endParaRPr lang="en-US"/>
           </a:p>
@@ -2127,6 +2122,7 @@
               <a:rPr lang="en-US" smtClean="0"/>
               <a:t>Click to edit Master text styles</a:t>
             </a:r>
+            <a:endParaRPr lang="en-US" smtClean="0"/>
           </a:p>
           <a:p>
             <a:pPr lvl="1"/>
@@ -2134,6 +2130,7 @@
               <a:rPr lang="en-US" smtClean="0"/>
               <a:t>Second level</a:t>
             </a:r>
+            <a:endParaRPr lang="en-US" smtClean="0"/>
           </a:p>
           <a:p>
             <a:pPr lvl="2"/>
@@ -2141,6 +2138,7 @@
               <a:rPr lang="en-US" smtClean="0"/>
               <a:t>Third level</a:t>
             </a:r>
+            <a:endParaRPr lang="en-US" smtClean="0"/>
           </a:p>
           <a:p>
             <a:pPr lvl="3"/>
@@ -2148,6 +2146,7 @@
               <a:rPr lang="en-US" smtClean="0"/>
               <a:t>Fourth level</a:t>
             </a:r>
+            <a:endParaRPr lang="en-US" smtClean="0"/>
           </a:p>
           <a:p>
             <a:pPr lvl="4"/>
@@ -2221,6 +2220,7 @@
               <a:rPr lang="en-US" smtClean="0"/>
               <a:t>Click to edit Master text styles</a:t>
             </a:r>
+            <a:endParaRPr lang="en-US" smtClean="0"/>
           </a:p>
         </p:txBody>
       </p:sp>
@@ -2241,8 +2241,6 @@
           <a:p>
             <a:fld id="{1D8BD707-D9CF-40AE-B4C6-C98DA3205C09}" type="datetimeFigureOut">
               <a:rPr lang="en-US" smtClean="0"/>
-              <a:pPr/>
-              <a:t>7/29/2026</a:t>
             </a:fld>
             <a:endParaRPr lang="en-US"/>
           </a:p>
@@ -2284,8 +2282,6 @@
           <a:p>
             <a:fld id="{B6F15528-21DE-4FAA-801E-634DDDAF4B2B}" type="slidenum">
               <a:rPr lang="en-US" smtClean="0"/>
-              <a:pPr/>
-              <a:t>‹#›</a:t>
             </a:fld>
             <a:endParaRPr lang="en-US"/>
           </a:p>
@@ -2471,6 +2467,7 @@
               <a:rPr lang="en-US" smtClean="0"/>
               <a:t>Click to edit Master text styles</a:t>
             </a:r>
+            <a:endParaRPr lang="en-US" smtClean="0"/>
           </a:p>
         </p:txBody>
       </p:sp>
@@ -2491,8 +2488,6 @@
           <a:p>
             <a:fld id="{1D8BD707-D9CF-40AE-B4C6-C98DA3205C09}" type="datetimeFigureOut">
               <a:rPr lang="en-US" smtClean="0"/>
-              <a:pPr/>
-              <a:t>7/29/2026</a:t>
             </a:fld>
             <a:endParaRPr lang="en-US"/>
           </a:p>
@@ -2534,8 +2529,6 @@
           <a:p>
             <a:fld id="{B6F15528-21DE-4FAA-801E-634DDDAF4B2B}" type="slidenum">
               <a:rPr lang="en-US" smtClean="0"/>
-              <a:pPr/>
-              <a:t>‹#›</a:t>
             </a:fld>
             <a:endParaRPr lang="en-US"/>
           </a:p>
@@ -2634,6 +2627,7 @@
               <a:rPr lang="en-US" smtClean="0"/>
               <a:t>Click to edit Master text styles</a:t>
             </a:r>
+            <a:endParaRPr lang="en-US" smtClean="0"/>
           </a:p>
           <a:p>
             <a:pPr lvl="1"/>
@@ -2641,6 +2635,7 @@
               <a:rPr lang="en-US" smtClean="0"/>
               <a:t>Second level</a:t>
             </a:r>
+            <a:endParaRPr lang="en-US" smtClean="0"/>
           </a:p>
           <a:p>
             <a:pPr lvl="2"/>
@@ -2648,6 +2643,7 @@
               <a:rPr lang="en-US" smtClean="0"/>
               <a:t>Third level</a:t>
             </a:r>
+            <a:endParaRPr lang="en-US" smtClean="0"/>
           </a:p>
           <a:p>
             <a:pPr lvl="3"/>
@@ -2655,6 +2651,7 @@
               <a:rPr lang="en-US" smtClean="0"/>
               <a:t>Fourth level</a:t>
             </a:r>
+            <a:endParaRPr lang="en-US" smtClean="0"/>
           </a:p>
           <a:p>
             <a:pPr lvl="4"/>
@@ -2701,8 +2698,6 @@
           <a:p>
             <a:fld id="{1D8BD707-D9CF-40AE-B4C6-C98DA3205C09}" type="datetimeFigureOut">
               <a:rPr lang="en-US" smtClean="0"/>
-              <a:pPr/>
-              <a:t>7/29/2026</a:t>
             </a:fld>
             <a:endParaRPr lang="en-US"/>
           </a:p>
@@ -2780,8 +2775,6 @@
           <a:p>
             <a:fld id="{B6F15528-21DE-4FAA-801E-634DDDAF4B2B}" type="slidenum">
               <a:rPr lang="en-US" smtClean="0"/>
-              <a:pPr/>
-              <a:t>‹#›</a:t>
             </a:fld>
             <a:endParaRPr lang="en-US"/>
           </a:p>
@@ -2825,7 +2818,7 @@
         <a:spcBef>
           <a:spcPct val="20000"/>
         </a:spcBef>
-        <a:buFont typeface="Arial" pitchFamily="34" charset="0"/>
+        <a:buFont typeface="Arial" panose="02080604020202020204" pitchFamily="34" charset="0"/>
         <a:buChar char="•"/>
         <a:defRPr sz="3200" kern="1200">
           <a:solidFill>
@@ -2840,7 +2833,7 @@
         <a:spcBef>
           <a:spcPct val="20000"/>
         </a:spcBef>
-        <a:buFont typeface="Arial" pitchFamily="34" charset="0"/>
+        <a:buFont typeface="Arial" panose="02080604020202020204" pitchFamily="34" charset="0"/>
         <a:buChar char="–"/>
         <a:defRPr sz="2800" kern="1200">
           <a:solidFill>
@@ -2855,7 +2848,7 @@
         <a:spcBef>
           <a:spcPct val="20000"/>
         </a:spcBef>
-        <a:buFont typeface="Arial" pitchFamily="34" charset="0"/>
+        <a:buFont typeface="Arial" panose="02080604020202020204" pitchFamily="34" charset="0"/>
         <a:buChar char="•"/>
         <a:defRPr sz="2400" kern="1200">
           <a:solidFill>
@@ -2870,7 +2863,7 @@
         <a:spcBef>
           <a:spcPct val="20000"/>
         </a:spcBef>
-        <a:buFont typeface="Arial" pitchFamily="34" charset="0"/>
+        <a:buFont typeface="Arial" panose="02080604020202020204" pitchFamily="34" charset="0"/>
         <a:buChar char="–"/>
         <a:defRPr sz="2000" kern="1200">
           <a:solidFill>
@@ -2885,7 +2878,7 @@
         <a:spcBef>
           <a:spcPct val="20000"/>
         </a:spcBef>
-        <a:buFont typeface="Arial" pitchFamily="34" charset="0"/>
+        <a:buFont typeface="Arial" panose="02080604020202020204" pitchFamily="34" charset="0"/>
         <a:buChar char="»"/>
         <a:defRPr sz="2000" kern="1200">
           <a:solidFill>
@@ -2900,7 +2893,7 @@
         <a:spcBef>
           <a:spcPct val="20000"/>
         </a:spcBef>
-        <a:buFont typeface="Arial" pitchFamily="34" charset="0"/>
+        <a:buFont typeface="Arial" panose="02080604020202020204" pitchFamily="34" charset="0"/>
         <a:buChar char="•"/>
         <a:defRPr sz="2000" kern="1200">
           <a:solidFill>
@@ -2915,7 +2908,7 @@
         <a:spcBef>
           <a:spcPct val="20000"/>
         </a:spcBef>
-        <a:buFont typeface="Arial" pitchFamily="34" charset="0"/>
+        <a:buFont typeface="Arial" panose="02080604020202020204" pitchFamily="34" charset="0"/>
         <a:buChar char="•"/>
         <a:defRPr sz="2000" kern="1200">
           <a:solidFill>
@@ -2930,7 +2923,7 @@
         <a:spcBef>
           <a:spcPct val="20000"/>
         </a:spcBef>
-        <a:buFont typeface="Arial" pitchFamily="34" charset="0"/>
+        <a:buFont typeface="Arial" panose="02080604020202020204" pitchFamily="34" charset="0"/>
         <a:buChar char="•"/>
         <a:defRPr sz="2000" kern="1200">
           <a:solidFill>
@@ -2945,7 +2938,7 @@
         <a:spcBef>
           <a:spcPct val="20000"/>
         </a:spcBef>
-        <a:buFont typeface="Arial" pitchFamily="34" charset="0"/>
+        <a:buFont typeface="Arial" panose="02080604020202020204" pitchFamily="34" charset="0"/>
         <a:buChar char="•"/>
         <a:defRPr sz="2000" kern="1200">
           <a:solidFill>
@@ -3143,15 +3136,7 @@
                   <a:schemeClr val="tx1"/>
                 </a:solidFill>
               </a:rPr>
-              <a:t> is a non-linear data </a:t>
-            </a:r>
-            <a:r>
-              <a:rPr lang="en-US" dirty="0" smtClean="0">
-                <a:solidFill>
-                  <a:schemeClr val="tx1"/>
-                </a:solidFill>
-              </a:rPr>
-              <a:t>structure and </a:t>
+              <a:t> is a non-linear data structure and </a:t>
             </a:r>
             <a:r>
               <a:rPr lang="en-US" b="1" dirty="0" smtClean="0">
@@ -3232,16 +3217,13 @@
               </a:rPr>
               <a:t>.</a:t>
             </a:r>
-          </a:p>
-          <a:p>
-            <a:r>
-              <a:rPr lang="en-US" dirty="0" smtClean="0">
-                <a:solidFill>
-                  <a:schemeClr val="tx1"/>
-                </a:solidFill>
-              </a:rPr>
-              <a:t/>
-            </a:r>
+            <a:endParaRPr lang="en-US" dirty="0" smtClean="0">
+              <a:solidFill>
+                <a:schemeClr val="tx1"/>
+              </a:solidFill>
+            </a:endParaRPr>
+          </a:p>
+          <a:p>
             <a:br>
               <a:rPr lang="en-US" dirty="0" smtClean="0">
                 <a:solidFill>
@@ -3266,7 +3248,7 @@
           <p:nvPr/>
         </p:nvPicPr>
         <p:blipFill>
-          <a:blip r:embed="rId2" cstate="print"/>
+          <a:blip r:embed="rId1" cstate="print"/>
           <a:srcRect/>
           <a:stretch>
             <a:fillRect/>
@@ -3372,37 +3354,19 @@
               <a:rPr lang="en-US" dirty="0" smtClean="0"/>
               <a:t>.</a:t>
             </a:r>
+            <a:endParaRPr lang="en-US" dirty="0" smtClean="0"/>
           </a:p>
           <a:p>
             <a:r>
               <a:rPr lang="en-US" b="1" dirty="0" smtClean="0"/>
               <a:t>A. Adjacency Matrix</a:t>
             </a:r>
-          </a:p>
-          <a:p>
-            <a:r>
-              <a:rPr lang="en-US" dirty="0" smtClean="0"/>
-              <a:t>A 2D array </a:t>
-            </a:r>
-            <a:r>
-              <a:rPr lang="en-US" dirty="0" smtClean="0"/>
-              <a:t>A </a:t>
-            </a:r>
-            <a:r>
-              <a:rPr lang="en-US" dirty="0" smtClean="0"/>
-              <a:t>of size </a:t>
-            </a:r>
-            <a:r>
-              <a:rPr lang="en-US" dirty="0" smtClean="0"/>
-              <a:t>V * V, </a:t>
-            </a:r>
-            <a:r>
-              <a:rPr lang="en-US" dirty="0" smtClean="0"/>
-              <a:t>where </a:t>
-            </a:r>
-            <a:r>
-              <a:rPr lang="en-US" dirty="0" smtClean="0"/>
-              <a:t>A[</a:t>
+            <a:endParaRPr lang="en-US" b="1" dirty="0" smtClean="0"/>
+          </a:p>
+          <a:p>
+            <a:r>
+              <a:rPr lang="en-US" dirty="0" smtClean="0"/>
+              <a:t>A 2D array A of size V * V, where A[</a:t>
             </a:r>
             <a:r>
               <a:rPr lang="en-US" dirty="0" err="1" smtClean="0"/>
@@ -3410,15 +3374,7 @@
             </a:r>
             <a:r>
               <a:rPr lang="en-US" dirty="0" smtClean="0"/>
-              <a:t>][j] = </a:t>
-            </a:r>
-            <a:r>
-              <a:rPr lang="en-US" dirty="0" smtClean="0"/>
-              <a:t>1 </a:t>
-            </a:r>
-            <a:r>
-              <a:rPr lang="en-US" dirty="0" smtClean="0"/>
-              <a:t>(or edge weight) if an edge exists from vertex </a:t>
+              <a:t>][j] = 1 (or edge weight) if an edge exists from vertex </a:t>
             </a:r>
             <a:r>
               <a:rPr lang="en-US" dirty="0" err="1" smtClean="0"/>
@@ -3426,28 +3382,9 @@
             </a:r>
             <a:r>
               <a:rPr lang="en-US" dirty="0" smtClean="0"/>
-              <a:t> </a:t>
-            </a:r>
-            <a:r>
-              <a:rPr lang="en-US" dirty="0" smtClean="0"/>
-              <a:t>to vertex </a:t>
-            </a:r>
-            <a:r>
-              <a:rPr lang="en-US" dirty="0" smtClean="0"/>
-              <a:t>j, </a:t>
-            </a:r>
-            <a:r>
-              <a:rPr lang="en-US" dirty="0" smtClean="0"/>
-              <a:t>and </a:t>
-            </a:r>
-            <a:r>
-              <a:rPr lang="en-US" dirty="0" smtClean="0"/>
-              <a:t>0 </a:t>
-            </a:r>
-            <a:r>
-              <a:rPr lang="en-US" dirty="0" smtClean="0"/>
-              <a:t>otherwise.</a:t>
-            </a:r>
+              <a:t> to vertex j, and 0 otherwise.</a:t>
+            </a:r>
+            <a:endParaRPr lang="en-US" dirty="0" smtClean="0"/>
           </a:p>
           <a:p>
             <a:endParaRPr lang="en-US" dirty="0"/>
@@ -3522,7 +3459,7 @@
           <p:nvPr/>
         </p:nvPicPr>
         <p:blipFill>
-          <a:blip r:embed="rId2" cstate="print"/>
+          <a:blip r:embed="rId1" cstate="print"/>
           <a:srcRect/>
           <a:stretch>
             <a:fillRect/>
@@ -3554,7 +3491,7 @@
           <p:nvPr/>
         </p:nvPicPr>
         <p:blipFill>
-          <a:blip r:embed="rId3" cstate="print"/>
+          <a:blip r:embed="rId2" cstate="print"/>
           <a:srcRect/>
           <a:stretch>
             <a:fillRect/>
@@ -3654,19 +3591,7 @@
           <a:p>
             <a:r>
               <a:rPr lang="en-US" dirty="0" smtClean="0"/>
-              <a:t>An </a:t>
-            </a:r>
-            <a:r>
-              <a:rPr lang="en-US" dirty="0" smtClean="0"/>
-              <a:t>array or dynamic list of size </a:t>
-            </a:r>
-            <a:r>
-              <a:rPr lang="en-US" dirty="0" smtClean="0"/>
-              <a:t>V, </a:t>
-            </a:r>
-            <a:r>
-              <a:rPr lang="en-US" dirty="0" smtClean="0"/>
-              <a:t>where each index </a:t>
+              <a:t>An array or dynamic list of size V, where each index </a:t>
             </a:r>
             <a:r>
               <a:rPr lang="en-US" dirty="0" err="1" smtClean="0"/>
@@ -3674,12 +3599,9 @@
             </a:r>
             <a:r>
               <a:rPr lang="en-US" dirty="0" smtClean="0"/>
-              <a:t> </a:t>
-            </a:r>
-            <a:r>
-              <a:rPr lang="en-US" dirty="0" smtClean="0"/>
-              <a:t>stores a linked list/vector of adjacent vertices.</a:t>
-            </a:r>
+              <a:t> stores a linked list/vector of adjacent vertices.</a:t>
+            </a:r>
+            <a:endParaRPr lang="en-US" dirty="0" smtClean="0"/>
           </a:p>
           <a:p>
             <a:endParaRPr lang="en-US" dirty="0"/>
@@ -3695,7 +3617,7 @@
           <p:nvPr/>
         </p:nvPicPr>
         <p:blipFill>
-          <a:blip r:embed="rId2" cstate="print"/>
+          <a:blip r:embed="rId1" cstate="print"/>
           <a:srcRect/>
           <a:stretch>
             <a:fillRect/>
@@ -3703,7 +3625,7 @@
         </p:blipFill>
         <p:spPr bwMode="auto">
           <a:xfrm>
-            <a:off x="533400" y="2057400"/>
+            <a:off x="533400" y="2066925"/>
             <a:ext cx="5248275" cy="2790825"/>
           </a:xfrm>
           <a:prstGeom prst="rect">
@@ -3727,7 +3649,7 @@
           <p:nvPr/>
         </p:nvPicPr>
         <p:blipFill>
-          <a:blip r:embed="rId3" cstate="print"/>
+          <a:blip r:embed="rId2" cstate="print"/>
           <a:srcRect/>
           <a:stretch>
             <a:fillRect/>
@@ -3799,11 +3721,7 @@
           <a:p>
             <a:r>
               <a:rPr lang="en-US" dirty="0" smtClean="0"/>
-              <a:t>Graph </a:t>
-            </a:r>
-            <a:r>
-              <a:rPr lang="en-US" dirty="0" smtClean="0"/>
-              <a:t>Traversals</a:t>
+              <a:t>Graph Traversals</a:t>
             </a:r>
             <a:br>
               <a:rPr lang="en-US" dirty="0" smtClean="0"/>
@@ -3841,11 +3759,7 @@
           <a:p>
             <a:r>
               <a:rPr lang="en-US" b="1" dirty="0" smtClean="0"/>
-              <a:t>Strategy</a:t>
-            </a:r>
-            <a:r>
-              <a:rPr lang="en-US" b="1" dirty="0" smtClean="0"/>
-              <a:t>:</a:t>
+              <a:t>Strategy:</a:t>
             </a:r>
             <a:r>
               <a:rPr lang="en-US" dirty="0" smtClean="0"/>
@@ -3859,6 +3773,7 @@
               <a:rPr lang="en-US" dirty="0" smtClean="0"/>
               <a:t> data structure.</a:t>
             </a:r>
+            <a:endParaRPr lang="en-US" dirty="0" smtClean="0"/>
           </a:p>
           <a:p>
             <a:r>
@@ -3877,6 +3792,7 @@
               <a:rPr lang="en-US" dirty="0" smtClean="0"/>
               <a:t> graphs, finding connected components.</a:t>
             </a:r>
+            <a:endParaRPr lang="en-US" dirty="0" smtClean="0"/>
           </a:p>
           <a:p>
             <a:r>
@@ -3885,19 +3801,7 @@
             </a:r>
             <a:r>
               <a:rPr lang="en-US" dirty="0" smtClean="0"/>
-              <a:t> </a:t>
-            </a:r>
-            <a:r>
-              <a:rPr lang="en-US" dirty="0" smtClean="0"/>
-              <a:t>O(V </a:t>
-            </a:r>
-            <a:r>
-              <a:rPr lang="en-US" dirty="0" smtClean="0"/>
-              <a:t>+ E</a:t>
-            </a:r>
-            <a:r>
-              <a:rPr lang="en-US" dirty="0" smtClean="0"/>
-              <a:t>)</a:t>
+              <a:t> O(V + E)</a:t>
             </a:r>
             <a:endParaRPr lang="en-US" dirty="0" smtClean="0"/>
           </a:p>
@@ -3908,11 +3812,7 @@
             </a:r>
             <a:r>
               <a:rPr lang="en-US" dirty="0" smtClean="0"/>
-              <a:t> </a:t>
-            </a:r>
-            <a:r>
-              <a:rPr lang="en-US" dirty="0" smtClean="0"/>
-              <a:t>O(V)</a:t>
+              <a:t> O(V)</a:t>
             </a:r>
             <a:endParaRPr lang="en-US" dirty="0" smtClean="0"/>
           </a:p>
@@ -3993,11 +3893,7 @@
           <a:p>
             <a:r>
               <a:rPr lang="en-US" b="1" dirty="0" smtClean="0"/>
-              <a:t>Strategy</a:t>
-            </a:r>
-            <a:r>
-              <a:rPr lang="en-US" b="1" dirty="0" smtClean="0"/>
-              <a:t>:</a:t>
+              <a:t>Strategy:</a:t>
             </a:r>
             <a:r>
               <a:rPr lang="en-US" dirty="0" smtClean="0"/>
@@ -4011,6 +3907,7 @@
               <a:rPr lang="en-US" dirty="0" smtClean="0"/>
               <a:t> or recursion.</a:t>
             </a:r>
+            <a:endParaRPr lang="en-US" dirty="0" smtClean="0"/>
           </a:p>
           <a:p>
             <a:r>
@@ -4021,6 +3918,7 @@
               <a:rPr lang="en-US" dirty="0" smtClean="0"/>
               <a:t> Cycle detection, topological sorting, solving mazes.</a:t>
             </a:r>
+            <a:endParaRPr lang="en-US" dirty="0" smtClean="0"/>
           </a:p>
           <a:p>
             <a:r>
@@ -4029,19 +3927,7 @@
             </a:r>
             <a:r>
               <a:rPr lang="en-US" dirty="0" smtClean="0"/>
-              <a:t> </a:t>
-            </a:r>
-            <a:r>
-              <a:rPr lang="en-US" dirty="0" smtClean="0"/>
-              <a:t>O(V </a:t>
-            </a:r>
-            <a:r>
-              <a:rPr lang="en-US" dirty="0" smtClean="0"/>
-              <a:t>+ E</a:t>
-            </a:r>
-            <a:r>
-              <a:rPr lang="en-US" dirty="0" smtClean="0"/>
-              <a:t>)</a:t>
+              <a:t> O(V + E)</a:t>
             </a:r>
             <a:endParaRPr lang="en-US" dirty="0" smtClean="0"/>
           </a:p>
@@ -4052,11 +3938,7 @@
             </a:r>
             <a:r>
               <a:rPr lang="en-US" dirty="0" smtClean="0"/>
-              <a:t> </a:t>
-            </a:r>
-            <a:r>
-              <a:rPr lang="en-US" dirty="0" smtClean="0"/>
-              <a:t>O(V)</a:t>
+              <a:t> O(V)</a:t>
             </a:r>
             <a:endParaRPr lang="en-US" dirty="0" smtClean="0"/>
           </a:p>
@@ -4101,7 +3983,7 @@
           </p:nvPr>
         </p:nvPicPr>
         <p:blipFill>
-          <a:blip r:embed="rId2" cstate="print"/>
+          <a:blip r:embed="rId1" cstate="print"/>
           <a:srcRect/>
           <a:stretch>
             <a:fillRect/>
@@ -4197,12 +4079,9 @@
             <a:pPr fontAlgn="base"/>
             <a:r>
               <a:rPr lang="en-US" dirty="0" smtClean="0"/>
-              <a:t>Trees </a:t>
-            </a:r>
-            <a:r>
-              <a:rPr lang="en-US" dirty="0" smtClean="0"/>
-              <a:t>are useful for storing data that naturally forms a hierarchy.</a:t>
-            </a:r>
+              <a:t>Trees are useful for storing data that naturally forms a hierarchy.</a:t>
+            </a:r>
+            <a:endParaRPr lang="en-US" dirty="0" smtClean="0"/>
           </a:p>
           <a:p>
             <a:pPr fontAlgn="base"/>
@@ -4210,6 +4089,7 @@
               <a:rPr lang="en-US" dirty="0" smtClean="0"/>
               <a:t>File systems on computers are structured as trees, with folders containing subfolders and files.</a:t>
             </a:r>
+            <a:endParaRPr lang="en-US" dirty="0" smtClean="0"/>
           </a:p>
           <a:p>
             <a:pPr fontAlgn="base"/>
@@ -4233,6 +4113,7 @@
               <a:rPr lang="en-US" dirty="0" smtClean="0"/>
               <a:t> tags can have their own child nodes, forming a hierarchical structure.</a:t>
             </a:r>
+            <a:endParaRPr lang="en-US" dirty="0" smtClean="0"/>
           </a:p>
           <a:p>
             <a:pPr fontAlgn="base"/>
@@ -4240,6 +4121,7 @@
               <a:rPr lang="en-US" dirty="0" smtClean="0"/>
               <a:t>Trees help in efficient data organization and retrieval for hierarchical relationships.</a:t>
             </a:r>
+            <a:endParaRPr lang="en-US" dirty="0" smtClean="0"/>
           </a:p>
           <a:p>
             <a:endParaRPr lang="en-US" dirty="0"/>
@@ -4321,6 +4203,7 @@
               <a:rPr lang="en-US" dirty="0" smtClean="0"/>
               <a:t>Tree data structures can be classified based on the number of children each node can have.</a:t>
             </a:r>
+            <a:endParaRPr lang="en-US" dirty="0" smtClean="0"/>
           </a:p>
           <a:p>
             <a:pPr fontAlgn="base"/>
@@ -4328,6 +4211,7 @@
               <a:rPr lang="en-US" b="1" dirty="0" smtClean="0"/>
               <a:t>Binary Tree:</a:t>
             </a:r>
+            <a:endParaRPr lang="en-US" b="1" dirty="0" smtClean="0"/>
           </a:p>
           <a:p>
             <a:pPr fontAlgn="base"/>
@@ -4335,6 +4219,7 @@
               <a:rPr lang="en-US" dirty="0" smtClean="0"/>
               <a:t>Each node can have a maximum of two children.</a:t>
             </a:r>
+            <a:endParaRPr lang="en-US" dirty="0" smtClean="0"/>
           </a:p>
           <a:p>
             <a:pPr fontAlgn="base"/>
@@ -4346,6 +4231,7 @@
               <a:rPr lang="en-US" dirty="0" smtClean="0"/>
               <a:t> – every node has either 0 or 2 children.</a:t>
             </a:r>
+            <a:endParaRPr lang="en-US" dirty="0" smtClean="0"/>
           </a:p>
           <a:p>
             <a:pPr fontAlgn="base"/>
@@ -4357,6 +4243,7 @@
               <a:rPr lang="en-US" dirty="0" smtClean="0"/>
               <a:t> – all levels are fully filled except possibly the last, which is filled from left to right.</a:t>
             </a:r>
+            <a:endParaRPr lang="en-US" dirty="0" smtClean="0"/>
           </a:p>
           <a:p>
             <a:pPr fontAlgn="base"/>
@@ -4376,6 +4263,7 @@
               <a:rPr lang="en-US" dirty="0" smtClean="0"/>
               <a:t> of every node is minimal.</a:t>
             </a:r>
+            <a:endParaRPr lang="en-US" dirty="0" smtClean="0"/>
           </a:p>
           <a:p>
             <a:endParaRPr lang="en-US" dirty="0"/>
@@ -4434,6 +4322,7 @@
               <a:rPr lang="en-US" b="1" dirty="0" smtClean="0"/>
               <a:t>Ternary Tree:</a:t>
             </a:r>
+            <a:endParaRPr lang="en-US" b="1" dirty="0" smtClean="0"/>
           </a:p>
           <a:p>
             <a:pPr fontAlgn="base">
@@ -4441,16 +4330,9 @@
             </a:pPr>
             <a:r>
               <a:rPr lang="en-US" dirty="0" smtClean="0"/>
-              <a:t>   Each </a:t>
-            </a:r>
-            <a:r>
-              <a:rPr lang="en-US" dirty="0" smtClean="0"/>
-              <a:t>node can have at most three children, often labeled as left, middle, and right</a:t>
-            </a:r>
-            <a:r>
-              <a:rPr lang="en-US" dirty="0" smtClean="0"/>
-              <a:t>.</a:t>
-            </a:r>
+              <a:t>   Each node can have at most three children, often labeled as left, middle, and right.</a:t>
+            </a:r>
+            <a:endParaRPr lang="en-US" dirty="0" smtClean="0"/>
           </a:p>
           <a:p>
             <a:pPr fontAlgn="base">
@@ -4472,6 +4354,7 @@
               <a:rPr lang="en-US" b="1" dirty="0" smtClean="0"/>
               <a:t> Tree (or Generic Tree):</a:t>
             </a:r>
+            <a:endParaRPr lang="en-US" b="1" dirty="0" smtClean="0"/>
           </a:p>
           <a:p>
             <a:pPr fontAlgn="base">
@@ -4479,12 +4362,9 @@
             </a:pPr>
             <a:r>
               <a:rPr lang="en-US" dirty="0" smtClean="0"/>
-              <a:t>	Each </a:t>
-            </a:r>
-            <a:r>
-              <a:rPr lang="en-US" dirty="0" smtClean="0"/>
-              <a:t>node can have any number of children.</a:t>
-            </a:r>
+              <a:t>	Each node can have any number of children.</a:t>
+            </a:r>
+            <a:endParaRPr lang="en-US" dirty="0" smtClean="0"/>
           </a:p>
           <a:p>
             <a:pPr fontAlgn="base">
@@ -4492,12 +4372,9 @@
             </a:pPr>
             <a:r>
               <a:rPr lang="en-US" dirty="0" smtClean="0"/>
-              <a:t>	Each </a:t>
-            </a:r>
-            <a:r>
-              <a:rPr lang="en-US" dirty="0" smtClean="0"/>
-              <a:t>node typically contains: Some data , A list of references to its children (duplicates are not allowed).</a:t>
-            </a:r>
+              <a:t>	Each node typically contains: Some data , A list of references to its children (duplicates are not allowed).</a:t>
+            </a:r>
+            <a:endParaRPr lang="en-US" dirty="0" smtClean="0"/>
           </a:p>
           <a:p>
             <a:pPr fontAlgn="base">
@@ -4505,12 +4382,9 @@
             </a:pPr>
             <a:r>
               <a:rPr lang="en-US" dirty="0" smtClean="0"/>
-              <a:t>	Unlike </a:t>
-            </a:r>
-            <a:r>
-              <a:rPr lang="en-US" dirty="0" smtClean="0"/>
-              <a:t>linked lists, nodes store references to multiple child nodes.</a:t>
-            </a:r>
+              <a:t>	Unlike linked lists, nodes store references to multiple child nodes.</a:t>
+            </a:r>
+            <a:endParaRPr lang="en-US" dirty="0" smtClean="0"/>
           </a:p>
           <a:p>
             <a:endParaRPr lang="en-US" dirty="0"/>
@@ -4601,6 +4475,7 @@
               <a:rPr lang="en-US" dirty="0" smtClean="0"/>
               <a:t> – create a tree in the data structure.</a:t>
             </a:r>
+            <a:endParaRPr lang="en-US" dirty="0" smtClean="0"/>
           </a:p>
           <a:p>
             <a:pPr fontAlgn="base"/>
@@ -4612,6 +4487,7 @@
               <a:rPr lang="en-US" dirty="0" smtClean="0"/>
               <a:t> − Inserts data in a tree.</a:t>
             </a:r>
+            <a:endParaRPr lang="en-US" dirty="0" smtClean="0"/>
           </a:p>
           <a:p>
             <a:pPr fontAlgn="base"/>
@@ -4623,6 +4499,7 @@
               <a:rPr lang="en-US" dirty="0" smtClean="0"/>
               <a:t> − Searches specific data in a tree to check whether it is present or not.</a:t>
             </a:r>
+            <a:endParaRPr lang="en-US" dirty="0" smtClean="0"/>
           </a:p>
           <a:p>
             <a:pPr marL="514350" indent="-514350">
@@ -4665,6 +4542,7 @@
                         <a:rPr lang="en-US" sz="3600" dirty="0" smtClean="0"/>
                         <a:t>Traversal:</a:t>
                       </a:r>
+                      <a:endParaRPr lang="en-US" sz="3600" dirty="0" smtClean="0"/>
                     </a:p>
                     <a:p>
                       <a:pPr marL="514350" indent="-514350">
@@ -4675,6 +4553,7 @@
                         <a:rPr lang="en-US" sz="3600" dirty="0" smtClean="0"/>
                         <a:t>Preorder</a:t>
                       </a:r>
+                      <a:endParaRPr lang="en-US" sz="3600" dirty="0" smtClean="0"/>
                     </a:p>
                     <a:p>
                       <a:pPr marL="514350" indent="-514350">
@@ -4713,24 +4592,28 @@
                         <a:rPr lang="pt-BR" sz="3200" dirty="0" smtClean="0"/>
                         <a:t>        A</a:t>
                       </a:r>
+                      <a:endParaRPr lang="pt-BR" sz="3200" dirty="0" smtClean="0"/>
                     </a:p>
                     <a:p>
                       <a:r>
                         <a:rPr lang="pt-BR" sz="3200" dirty="0" smtClean="0"/>
                         <a:t>      /   \</a:t>
                       </a:r>
+                      <a:endParaRPr lang="pt-BR" sz="3200" dirty="0" smtClean="0"/>
                     </a:p>
                     <a:p>
                       <a:r>
                         <a:rPr lang="pt-BR" sz="3200" dirty="0" smtClean="0"/>
                         <a:t>     B     C</a:t>
                       </a:r>
+                      <a:endParaRPr lang="pt-BR" sz="3200" dirty="0" smtClean="0"/>
                     </a:p>
                     <a:p>
                       <a:r>
                         <a:rPr lang="pt-BR" sz="3200" dirty="0" smtClean="0"/>
                         <a:t>    /  \</a:t>
                       </a:r>
+                      <a:endParaRPr lang="pt-BR" sz="3200" dirty="0" smtClean="0"/>
                     </a:p>
                     <a:p>
                       <a:r>
@@ -4820,12 +4703,9 @@
             </a:pPr>
             <a:r>
               <a:rPr lang="en-US" dirty="0" smtClean="0"/>
-              <a:t>A </a:t>
-            </a:r>
-            <a:r>
-              <a:rPr lang="en-US" dirty="0" smtClean="0"/>
-              <a:t>Binary Search Tree follows:</a:t>
-            </a:r>
+              <a:t>A Binary Search Tree follows:</a:t>
+            </a:r>
+            <a:endParaRPr lang="en-US" dirty="0" smtClean="0"/>
           </a:p>
           <a:p>
             <a:r>
@@ -4840,6 +4720,7 @@
               <a:rPr lang="en-US" dirty="0" smtClean="0"/>
               <a:t> &lt; Root </a:t>
             </a:r>
+            <a:endParaRPr lang="en-US" dirty="0" smtClean="0"/>
           </a:p>
           <a:p>
             <a:r>
@@ -4854,6 +4735,7 @@
               <a:rPr lang="en-US" dirty="0" smtClean="0"/>
               <a:t> &gt; Root</a:t>
             </a:r>
+            <a:endParaRPr lang="en-US" dirty="0" smtClean="0"/>
           </a:p>
           <a:p>
             <a:endParaRPr lang="en-US" dirty="0"/>
@@ -4959,24 +4841,14 @@
               <a:rPr lang="en-US" dirty="0" smtClean="0"/>
               <a:t> that connect pairs of vertices.</a:t>
             </a:r>
-          </a:p>
-          <a:p>
-            <a:r>
-              <a:rPr lang="en-US" dirty="0" smtClean="0"/>
-              <a:t>A graph is represented </a:t>
-            </a:r>
-            <a:r>
-              <a:rPr lang="en-US" dirty="0" smtClean="0"/>
-              <a:t>as:    G</a:t>
-            </a:r>
-            <a:r>
-              <a:rPr lang="en-US" dirty="0" smtClean="0"/>
-              <a:t>=(</a:t>
-            </a:r>
-            <a:r>
-              <a:rPr lang="en-US" dirty="0" smtClean="0"/>
-              <a:t>V,E)</a:t>
-            </a:r>
+            <a:endParaRPr lang="en-US" dirty="0" smtClean="0"/>
+          </a:p>
+          <a:p>
+            <a:r>
+              <a:rPr lang="en-US" dirty="0" smtClean="0"/>
+              <a:t>A graph is represented as:    G=(V,E)</a:t>
+            </a:r>
+            <a:endParaRPr lang="en-US" dirty="0" smtClean="0"/>
           </a:p>
           <a:p>
             <a:pPr>
@@ -4986,6 +4858,7 @@
               <a:rPr lang="en-US" dirty="0" smtClean="0"/>
               <a:t>where:</a:t>
             </a:r>
+            <a:endParaRPr lang="en-US" dirty="0" smtClean="0"/>
           </a:p>
           <a:p>
             <a:pPr>
@@ -4999,6 +4872,7 @@
               <a:rPr lang="en-US" dirty="0" smtClean="0"/>
               <a:t> = Set of Vertices (Nodes) </a:t>
             </a:r>
+            <a:endParaRPr lang="en-US" dirty="0" smtClean="0"/>
           </a:p>
           <a:p>
             <a:pPr>
@@ -5012,6 +4886,7 @@
               <a:rPr lang="en-US" dirty="0" smtClean="0"/>
               <a:t> = Set of Edges </a:t>
             </a:r>
+            <a:endParaRPr lang="en-US" dirty="0" smtClean="0"/>
           </a:p>
           <a:p>
             <a:endParaRPr lang="en-US" dirty="0"/>
@@ -5100,16 +4975,13 @@
           <a:p>
             <a:r>
               <a:rPr lang="en-US" b="1" dirty="0" smtClean="0"/>
-              <a:t>Adjacent </a:t>
-            </a:r>
-            <a:r>
-              <a:rPr lang="en-US" b="1" dirty="0" smtClean="0"/>
-              <a:t>Vertices:</a:t>
+              <a:t>Adjacent Vertices:</a:t>
             </a:r>
             <a:r>
               <a:rPr lang="en-US" dirty="0" smtClean="0"/>
               <a:t> Two vertices connected directly by an edge.</a:t>
             </a:r>
+            <a:endParaRPr lang="en-US" dirty="0" smtClean="0"/>
           </a:p>
           <a:p>
             <a:r>
@@ -5120,6 +4992,7 @@
               <a:rPr lang="en-US" dirty="0" smtClean="0"/>
               <a:t> Total number of edges connected to a vertex.</a:t>
             </a:r>
+            <a:endParaRPr lang="en-US" dirty="0" smtClean="0"/>
           </a:p>
           <a:p>
             <a:pPr lvl="1"/>
@@ -5131,6 +5004,7 @@
               <a:rPr lang="en-US" dirty="0" smtClean="0"/>
               <a:t> Number of incoming edges.</a:t>
             </a:r>
+            <a:endParaRPr lang="en-US" dirty="0" smtClean="0"/>
           </a:p>
           <a:p>
             <a:pPr lvl="1"/>
@@ -5142,6 +5016,7 @@
               <a:rPr lang="en-US" dirty="0" smtClean="0"/>
               <a:t> Number of outgoing edges.</a:t>
             </a:r>
+            <a:endParaRPr lang="en-US" dirty="0" smtClean="0"/>
           </a:p>
           <a:p>
             <a:r>
@@ -5152,6 +5027,7 @@
               <a:rPr lang="en-US" dirty="0" smtClean="0"/>
               <a:t> A sequence of vertices where each adjacent pair is connected by an edge.</a:t>
             </a:r>
+            <a:endParaRPr lang="en-US" dirty="0" smtClean="0"/>
           </a:p>
           <a:p>
             <a:r>
@@ -5162,6 +5038,7 @@
               <a:rPr lang="en-US" dirty="0" smtClean="0"/>
               <a:t> A path that starts and ends at the same vertex with no repeated edges.</a:t>
             </a:r>
+            <a:endParaRPr lang="en-US" dirty="0" smtClean="0"/>
           </a:p>
           <a:p>
             <a:r>
@@ -5172,6 +5049,7 @@
               <a:rPr lang="en-US" dirty="0" smtClean="0"/>
               <a:t> An edge that connects a vertex to itself.</a:t>
             </a:r>
+            <a:endParaRPr lang="en-US" dirty="0" smtClean="0"/>
           </a:p>
           <a:p>
             <a:r>
@@ -5182,6 +5060,7 @@
               <a:rPr lang="en-US" dirty="0" smtClean="0"/>
               <a:t> Two or more edges connecting the same pair of vertices.</a:t>
             </a:r>
+            <a:endParaRPr lang="en-US" dirty="0" smtClean="0"/>
           </a:p>
           <a:p>
             <a:r>
@@ -5192,6 +5071,7 @@
               <a:rPr lang="en-US" dirty="0" smtClean="0"/>
               <a:t> A graph with no self-loops or parallel edges.</a:t>
             </a:r>
+            <a:endParaRPr lang="en-US" dirty="0" smtClean="0"/>
           </a:p>
           <a:p>
             <a:r>
@@ -5202,6 +5082,7 @@
               <a:rPr lang="en-US" dirty="0" smtClean="0"/>
               <a:t> A graph where a path exists between every pair of vertices.</a:t>
             </a:r>
+            <a:endParaRPr lang="en-US" dirty="0" smtClean="0"/>
           </a:p>
           <a:p>
             <a:r>
@@ -5212,6 +5093,7 @@
               <a:rPr lang="en-US" dirty="0" smtClean="0"/>
               <a:t> Every vertex is reachable from every other vertex.</a:t>
             </a:r>
+            <a:endParaRPr lang="en-US" dirty="0" smtClean="0"/>
           </a:p>
           <a:p>
             <a:r>
@@ -5222,6 +5104,7 @@
               <a:rPr lang="en-US" dirty="0" smtClean="0"/>
               <a:t> Connected when direction of edges is ignored.</a:t>
             </a:r>
+            <a:endParaRPr lang="en-US" dirty="0" smtClean="0"/>
           </a:p>
           <a:p>
             <a:endParaRPr lang="en-US" dirty="0"/>
@@ -5925,7 +5808,10 @@
       </a:bgFillStyleLst>
     </a:fmtScheme>
   </a:themeElements>
-  <a:objectDefaults/>
-  <a:extraClrSchemeLst/>
+  <a:extLst>
+    <a:ext uri="{05A4C25C-085E-4340-85A3-A5531E510DB2}">
+      <thm15:themeFamily xmlns:thm15="http://schemas.microsoft.com/office/thememl/2012/main" name="Office Theme" id="{62F939B6-93AF-4DB8-9C6B-D6C7DFDC589F}" vid="{4A3C46E8-61CC-4603-A589-7422A47A8E4A}"/>
+    </a:ext>
+  </a:extLst>
 </a:theme>
 </file>